--- a/templates/process/process_6step_A.pptx
+++ b/templates/process/process_6step_A.pptx
@@ -3098,7 +3098,143 @@
       <p:grpSpPr/>
       <p:sp>
         <p:nvSpPr>
-          <p:cNvPr id="2" name="TextBox 1"/>
+          <p:cNvPr id="2" name="Rectangle 1"/>
+          <p:cNvSpPr/>
+          <p:nvPr/>
+        </p:nvSpPr>
+        <p:spPr>
+          <a:xfrm>
+            <a:off x="0" y="0"/>
+            <a:ext cx="7560000" cy="10692000"/>
+          </a:xfrm>
+          <a:prstGeom prst="rect">
+            <a:avLst/>
+          </a:prstGeom>
+          <a:solidFill>
+            <a:srgbClr val="FFFFFF"/>
+          </a:solidFill>
+          <a:ln>
+            <a:noFill/>
+          </a:ln>
+          <a:effectLst/>
+        </p:spPr>
+        <p:style>
+          <a:lnRef idx="1">
+            <a:schemeClr val="accent1"/>
+          </a:lnRef>
+          <a:fillRef idx="3">
+            <a:schemeClr val="accent1"/>
+          </a:fillRef>
+          <a:effectRef idx="2">
+            <a:schemeClr val="accent1"/>
+          </a:effectRef>
+          <a:fontRef idx="minor">
+            <a:schemeClr val="lt1"/>
+          </a:fontRef>
+        </p:style>
+        <p:txBody>
+          <a:bodyPr rtlCol="0" anchor="ctr"/>
+          <a:lstStyle/>
+          <a:p>
+            <a:pPr algn="ctr"/>
+          </a:p>
+        </p:txBody>
+      </p:sp>
+      <p:sp>
+        <p:nvSpPr>
+          <p:cNvPr id="3" name="Rectangle 2"/>
+          <p:cNvSpPr/>
+          <p:nvPr/>
+        </p:nvSpPr>
+        <p:spPr>
+          <a:xfrm>
+            <a:off x="0" y="10584000"/>
+            <a:ext cx="7560000" cy="108000"/>
+          </a:xfrm>
+          <a:prstGeom prst="rect">
+            <a:avLst/>
+          </a:prstGeom>
+          <a:solidFill>
+            <a:srgbClr val="C4B28C">
+              <a:alpha val="8000"/>
+            </a:srgbClr>
+          </a:solidFill>
+          <a:ln>
+            <a:noFill/>
+          </a:ln>
+          <a:effectLst/>
+        </p:spPr>
+        <p:style>
+          <a:lnRef idx="1">
+            <a:schemeClr val="accent1"/>
+          </a:lnRef>
+          <a:fillRef idx="3">
+            <a:schemeClr val="accent1"/>
+          </a:fillRef>
+          <a:effectRef idx="2">
+            <a:schemeClr val="accent1"/>
+          </a:effectRef>
+          <a:fontRef idx="minor">
+            <a:schemeClr val="lt1"/>
+          </a:fontRef>
+        </p:style>
+        <p:txBody>
+          <a:bodyPr rtlCol="0" anchor="ctr"/>
+          <a:lstStyle/>
+          <a:p>
+            <a:pPr algn="ctr"/>
+          </a:p>
+        </p:txBody>
+      </p:sp>
+      <p:sp>
+        <p:nvSpPr>
+          <p:cNvPr id="4" name="Rectangle 3"/>
+          <p:cNvSpPr/>
+          <p:nvPr/>
+        </p:nvSpPr>
+        <p:spPr>
+          <a:xfrm rot="19500000">
+            <a:off x="5256000" y="9036000"/>
+            <a:ext cx="1656000" cy="13970"/>
+          </a:xfrm>
+          <a:prstGeom prst="rect">
+            <a:avLst/>
+          </a:prstGeom>
+          <a:solidFill>
+            <a:srgbClr val="C4B28C">
+              <a:alpha val="10000"/>
+            </a:srgbClr>
+          </a:solidFill>
+          <a:ln>
+            <a:noFill/>
+          </a:ln>
+          <a:effectLst/>
+        </p:spPr>
+        <p:style>
+          <a:lnRef idx="1">
+            <a:schemeClr val="accent1"/>
+          </a:lnRef>
+          <a:fillRef idx="3">
+            <a:schemeClr val="accent1"/>
+          </a:fillRef>
+          <a:effectRef idx="2">
+            <a:schemeClr val="accent1"/>
+          </a:effectRef>
+          <a:fontRef idx="minor">
+            <a:schemeClr val="lt1"/>
+          </a:fontRef>
+        </p:style>
+        <p:txBody>
+          <a:bodyPr rtlCol="0" anchor="ctr"/>
+          <a:lstStyle/>
+          <a:p>
+            <a:pPr algn="ctr"/>
+          </a:p>
+        </p:txBody>
+      </p:sp>
+      <p:sp>
+        <p:nvSpPr>
+          <p:cNvPr id="5" name="TextBox 4"/>
           <p:cNvSpPr txBox="1"/>
           <p:nvPr/>
         </p:nvSpPr>
@@ -3137,7 +3273,7 @@
       </p:sp>
       <p:sp>
         <p:nvSpPr>
-          <p:cNvPr id="3" name="Rectangle 2"/>
+          <p:cNvPr id="6" name="Rectangle 5"/>
           <p:cNvSpPr/>
           <p:nvPr/>
         </p:nvSpPr>
@@ -3181,7 +3317,7 @@
       </p:sp>
       <p:grpSp>
         <p:nvGrpSpPr>
-          <p:cNvPr id="9" name="GROUP_STEP_1"/>
+          <p:cNvPr id="12" name="GROUP_STEP_1"/>
           <p:cNvGrpSpPr/>
           <p:nvPr/>
         </p:nvGrpSpPr>
@@ -3195,7 +3331,7 @@
         </p:grpSpPr>
         <p:sp>
           <p:nvSpPr>
-            <p:cNvPr id="4" name="PHOTO_1"/>
+            <p:cNvPr id="7" name="PHOTO_1"/>
             <p:cNvSpPr/>
             <p:nvPr/>
           </p:nvSpPr>
@@ -3239,7 +3375,7 @@
         </p:sp>
         <p:sp>
           <p:nvSpPr>
-            <p:cNvPr id="5" name="TextBox 4"/>
+            <p:cNvPr id="8" name="TextBox 7"/>
             <p:cNvSpPr txBox="1"/>
             <p:nvPr/>
           </p:nvSpPr>
@@ -3278,7 +3414,7 @@
         </p:sp>
         <p:sp>
           <p:nvSpPr>
-            <p:cNvPr id="6" name="TextBox 5"/>
+            <p:cNvPr id="9" name="TextBox 8"/>
             <p:cNvSpPr txBox="1"/>
             <p:nvPr/>
           </p:nvSpPr>
@@ -3317,7 +3453,7 @@
         </p:sp>
         <p:sp>
           <p:nvSpPr>
-            <p:cNvPr id="7" name="TextBox 6"/>
+            <p:cNvPr id="10" name="TextBox 9"/>
             <p:cNvSpPr txBox="1"/>
             <p:nvPr/>
           </p:nvSpPr>
@@ -3356,7 +3492,7 @@
         </p:sp>
         <p:sp>
           <p:nvSpPr>
-            <p:cNvPr id="8" name="TextBox 7"/>
+            <p:cNvPr id="11" name="TextBox 10"/>
             <p:cNvSpPr txBox="1"/>
             <p:nvPr/>
           </p:nvSpPr>
@@ -3396,7 +3532,7 @@
       </p:grpSp>
       <p:grpSp>
         <p:nvGrpSpPr>
-          <p:cNvPr id="14" name="GROUP_STEP_2"/>
+          <p:cNvPr id="17" name="GROUP_STEP_2"/>
           <p:cNvGrpSpPr/>
           <p:nvPr/>
         </p:nvGrpSpPr>
@@ -3410,7 +3546,7 @@
         </p:grpSpPr>
         <p:sp>
           <p:nvSpPr>
-            <p:cNvPr id="10" name="PHOTO_2"/>
+            <p:cNvPr id="13" name="PHOTO_2"/>
             <p:cNvSpPr/>
             <p:nvPr/>
           </p:nvSpPr>
@@ -3454,7 +3590,7 @@
         </p:sp>
         <p:sp>
           <p:nvSpPr>
-            <p:cNvPr id="11" name="TextBox 10"/>
+            <p:cNvPr id="14" name="TextBox 13"/>
             <p:cNvSpPr txBox="1"/>
             <p:nvPr/>
           </p:nvSpPr>
@@ -3493,7 +3629,7 @@
         </p:sp>
         <p:sp>
           <p:nvSpPr>
-            <p:cNvPr id="12" name="TextBox 11"/>
+            <p:cNvPr id="15" name="TextBox 14"/>
             <p:cNvSpPr txBox="1"/>
             <p:nvPr/>
           </p:nvSpPr>
@@ -3532,7 +3668,7 @@
         </p:sp>
         <p:sp>
           <p:nvSpPr>
-            <p:cNvPr id="13" name="TextBox 12"/>
+            <p:cNvPr id="16" name="TextBox 15"/>
             <p:cNvSpPr txBox="1"/>
             <p:nvPr/>
           </p:nvSpPr>
@@ -3572,7 +3708,7 @@
       </p:grpSp>
       <p:grpSp>
         <p:nvGrpSpPr>
-          <p:cNvPr id="20" name="GROUP_STEP_3"/>
+          <p:cNvPr id="23" name="GROUP_STEP_3"/>
           <p:cNvGrpSpPr/>
           <p:nvPr/>
         </p:nvGrpSpPr>
@@ -3586,7 +3722,7 @@
         </p:grpSpPr>
         <p:sp>
           <p:nvSpPr>
-            <p:cNvPr id="15" name="PHOTO_3"/>
+            <p:cNvPr id="18" name="PHOTO_3"/>
             <p:cNvSpPr/>
             <p:nvPr/>
           </p:nvSpPr>
@@ -3630,7 +3766,7 @@
         </p:sp>
         <p:sp>
           <p:nvSpPr>
-            <p:cNvPr id="16" name="TextBox 15"/>
+            <p:cNvPr id="19" name="TextBox 18"/>
             <p:cNvSpPr txBox="1"/>
             <p:nvPr/>
           </p:nvSpPr>
@@ -3669,7 +3805,7 @@
         </p:sp>
         <p:sp>
           <p:nvSpPr>
-            <p:cNvPr id="17" name="TextBox 16"/>
+            <p:cNvPr id="20" name="TextBox 19"/>
             <p:cNvSpPr txBox="1"/>
             <p:nvPr/>
           </p:nvSpPr>
@@ -3708,7 +3844,7 @@
         </p:sp>
         <p:sp>
           <p:nvSpPr>
-            <p:cNvPr id="18" name="TextBox 17"/>
+            <p:cNvPr id="21" name="TextBox 20"/>
             <p:cNvSpPr txBox="1"/>
             <p:nvPr/>
           </p:nvSpPr>
@@ -3747,7 +3883,7 @@
         </p:sp>
         <p:sp>
           <p:nvSpPr>
-            <p:cNvPr id="19" name="TextBox 18"/>
+            <p:cNvPr id="22" name="TextBox 21"/>
             <p:cNvSpPr txBox="1"/>
             <p:nvPr/>
           </p:nvSpPr>
@@ -3787,7 +3923,7 @@
       </p:grpSp>
       <p:grpSp>
         <p:nvGrpSpPr>
-          <p:cNvPr id="25" name="GROUP_STEP_4"/>
+          <p:cNvPr id="28" name="GROUP_STEP_4"/>
           <p:cNvGrpSpPr/>
           <p:nvPr/>
         </p:nvGrpSpPr>
@@ -3801,7 +3937,7 @@
         </p:grpSpPr>
         <p:sp>
           <p:nvSpPr>
-            <p:cNvPr id="21" name="PHOTO_4"/>
+            <p:cNvPr id="24" name="PHOTO_4"/>
             <p:cNvSpPr/>
             <p:nvPr/>
           </p:nvSpPr>
@@ -3845,7 +3981,7 @@
         </p:sp>
         <p:sp>
           <p:nvSpPr>
-            <p:cNvPr id="22" name="TextBox 21"/>
+            <p:cNvPr id="25" name="TextBox 24"/>
             <p:cNvSpPr txBox="1"/>
             <p:nvPr/>
           </p:nvSpPr>
@@ -3884,7 +4020,7 @@
         </p:sp>
         <p:sp>
           <p:nvSpPr>
-            <p:cNvPr id="23" name="TextBox 22"/>
+            <p:cNvPr id="26" name="TextBox 25"/>
             <p:cNvSpPr txBox="1"/>
             <p:nvPr/>
           </p:nvSpPr>
@@ -3923,7 +4059,7 @@
         </p:sp>
         <p:sp>
           <p:nvSpPr>
-            <p:cNvPr id="24" name="TextBox 23"/>
+            <p:cNvPr id="27" name="TextBox 26"/>
             <p:cNvSpPr txBox="1"/>
             <p:nvPr/>
           </p:nvSpPr>
@@ -3963,7 +4099,7 @@
       </p:grpSp>
       <p:grpSp>
         <p:nvGrpSpPr>
-          <p:cNvPr id="31" name="GROUP_STEP_5"/>
+          <p:cNvPr id="34" name="GROUP_STEP_5"/>
           <p:cNvGrpSpPr/>
           <p:nvPr/>
         </p:nvGrpSpPr>
@@ -3977,7 +4113,7 @@
         </p:grpSpPr>
         <p:sp>
           <p:nvSpPr>
-            <p:cNvPr id="26" name="PHOTO_5"/>
+            <p:cNvPr id="29" name="PHOTO_5"/>
             <p:cNvSpPr/>
             <p:nvPr/>
           </p:nvSpPr>
@@ -4021,7 +4157,7 @@
         </p:sp>
         <p:sp>
           <p:nvSpPr>
-            <p:cNvPr id="27" name="TextBox 26"/>
+            <p:cNvPr id="30" name="TextBox 29"/>
             <p:cNvSpPr txBox="1"/>
             <p:nvPr/>
           </p:nvSpPr>
@@ -4060,7 +4196,7 @@
         </p:sp>
         <p:sp>
           <p:nvSpPr>
-            <p:cNvPr id="28" name="TextBox 27"/>
+            <p:cNvPr id="31" name="TextBox 30"/>
             <p:cNvSpPr txBox="1"/>
             <p:nvPr/>
           </p:nvSpPr>
@@ -4099,7 +4235,7 @@
         </p:sp>
         <p:sp>
           <p:nvSpPr>
-            <p:cNvPr id="29" name="TextBox 28"/>
+            <p:cNvPr id="32" name="TextBox 31"/>
             <p:cNvSpPr txBox="1"/>
             <p:nvPr/>
           </p:nvSpPr>
@@ -4138,7 +4274,7 @@
         </p:sp>
         <p:sp>
           <p:nvSpPr>
-            <p:cNvPr id="30" name="TextBox 29"/>
+            <p:cNvPr id="33" name="TextBox 32"/>
             <p:cNvSpPr txBox="1"/>
             <p:nvPr/>
           </p:nvSpPr>
@@ -4178,7 +4314,7 @@
       </p:grpSp>
       <p:grpSp>
         <p:nvGrpSpPr>
-          <p:cNvPr id="36" name="GROUP_STEP_6"/>
+          <p:cNvPr id="39" name="GROUP_STEP_6"/>
           <p:cNvGrpSpPr/>
           <p:nvPr/>
         </p:nvGrpSpPr>
@@ -4192,7 +4328,7 @@
         </p:grpSpPr>
         <p:sp>
           <p:nvSpPr>
-            <p:cNvPr id="32" name="PHOTO_6"/>
+            <p:cNvPr id="35" name="PHOTO_6"/>
             <p:cNvSpPr/>
             <p:nvPr/>
           </p:nvSpPr>
@@ -4236,7 +4372,7 @@
         </p:sp>
         <p:sp>
           <p:nvSpPr>
-            <p:cNvPr id="33" name="TextBox 32"/>
+            <p:cNvPr id="36" name="TextBox 35"/>
             <p:cNvSpPr txBox="1"/>
             <p:nvPr/>
           </p:nvSpPr>
@@ -4275,7 +4411,7 @@
         </p:sp>
         <p:sp>
           <p:nvSpPr>
-            <p:cNvPr id="34" name="TextBox 33"/>
+            <p:cNvPr id="37" name="TextBox 36"/>
             <p:cNvSpPr txBox="1"/>
             <p:nvPr/>
           </p:nvSpPr>
@@ -4314,7 +4450,7 @@
         </p:sp>
         <p:sp>
           <p:nvSpPr>
-            <p:cNvPr id="35" name="TextBox 34"/>
+            <p:cNvPr id="38" name="TextBox 37"/>
             <p:cNvSpPr txBox="1"/>
             <p:nvPr/>
           </p:nvSpPr>
